--- a/data-eng/decks/w6d5s3.pptx
+++ b/data-eng/decks/w6d5s3.pptx
@@ -3100,7 +3100,7 @@
       <p:grpSpPr/>
       <p:sp>
         <p:nvSpPr>
-          <p:cNvPr id="2" name="Oval 1"/>
+          <p:cNvPr id="2" name="deckgen:decor"/>
           <p:cNvSpPr/>
           <p:nvPr/>
         </p:nvSpPr>
@@ -3130,7 +3130,7 @@
       </p:sp>
       <p:sp>
         <p:nvSpPr>
-          <p:cNvPr id="3" name="Oval 2"/>
+          <p:cNvPr id="3" name="deckgen:decor"/>
           <p:cNvSpPr/>
           <p:nvPr/>
         </p:nvSpPr>
@@ -3160,7 +3160,7 @@
       </p:sp>
       <p:sp>
         <p:nvSpPr>
-          <p:cNvPr id="4" name="Oval 3"/>
+          <p:cNvPr id="4" name="deckgen:decor"/>
           <p:cNvSpPr/>
           <p:nvPr/>
         </p:nvSpPr>
@@ -3190,7 +3190,7 @@
       </p:sp>
       <p:sp>
         <p:nvSpPr>
-          <p:cNvPr id="5" name="Rectangle 4"/>
+          <p:cNvPr id="5" name="deckgen:decor"/>
           <p:cNvSpPr/>
           <p:nvPr/>
         </p:nvSpPr>
@@ -3220,7 +3220,7 @@
       </p:sp>
       <p:sp>
         <p:nvSpPr>
-          <p:cNvPr id="6" name="Oval 5"/>
+          <p:cNvPr id="6" name="deckgen:decor"/>
           <p:cNvSpPr/>
           <p:nvPr/>
         </p:nvSpPr>
@@ -3250,7 +3250,7 @@
       </p:sp>
       <p:sp>
         <p:nvSpPr>
-          <p:cNvPr id="7" name="Oval 6"/>
+          <p:cNvPr id="7" name="deckgen:decor"/>
           <p:cNvSpPr/>
           <p:nvPr/>
         </p:nvSpPr>
@@ -3280,7 +3280,7 @@
       </p:sp>
       <p:sp>
         <p:nvSpPr>
-          <p:cNvPr id="8" name="Oval 7"/>
+          <p:cNvPr id="8" name="deckgen:decor"/>
           <p:cNvSpPr/>
           <p:nvPr/>
         </p:nvSpPr>
@@ -3310,7 +3310,7 @@
       </p:sp>
       <p:sp>
         <p:nvSpPr>
-          <p:cNvPr id="9" name="Oval 8"/>
+          <p:cNvPr id="9" name="deckgen:decor"/>
           <p:cNvSpPr/>
           <p:nvPr/>
         </p:nvSpPr>
@@ -3340,7 +3340,7 @@
       </p:sp>
       <p:sp>
         <p:nvSpPr>
-          <p:cNvPr id="10" name="Rectangle 9"/>
+          <p:cNvPr id="10" name="deckgen:decor"/>
           <p:cNvSpPr/>
           <p:nvPr/>
         </p:nvSpPr>
@@ -3600,7 +3600,7 @@
       <p:grpSpPr/>
       <p:sp>
         <p:nvSpPr>
-          <p:cNvPr id="2" name="Oval 1"/>
+          <p:cNvPr id="2" name="deckgen:decor"/>
           <p:cNvSpPr/>
           <p:nvPr/>
         </p:nvSpPr>
@@ -3630,7 +3630,7 @@
       </p:sp>
       <p:sp>
         <p:nvSpPr>
-          <p:cNvPr id="3" name="Oval 2"/>
+          <p:cNvPr id="3" name="deckgen:decor"/>
           <p:cNvSpPr/>
           <p:nvPr/>
         </p:nvSpPr>
@@ -3660,7 +3660,7 @@
       </p:sp>
       <p:sp>
         <p:nvSpPr>
-          <p:cNvPr id="4" name="Oval 3"/>
+          <p:cNvPr id="4" name="deckgen:decor"/>
           <p:cNvSpPr/>
           <p:nvPr/>
         </p:nvSpPr>
@@ -3866,7 +3866,7 @@
       </p:sp>
       <p:sp>
         <p:nvSpPr>
-          <p:cNvPr id="10" name="TextBox 9"/>
+          <p:cNvPr id="10" name="deckgen:ornament"/>
           <p:cNvSpPr txBox="1"/>
           <p:nvPr/>
         </p:nvSpPr>
@@ -4051,7 +4051,7 @@
       </p:sp>
       <p:sp>
         <p:nvSpPr>
-          <p:cNvPr id="14" name="TextBox 13"/>
+          <p:cNvPr id="14" name="deckgen:ornament"/>
           <p:cNvSpPr txBox="1"/>
           <p:nvPr/>
         </p:nvSpPr>
@@ -4236,7 +4236,7 @@
       </p:sp>
       <p:sp>
         <p:nvSpPr>
-          <p:cNvPr id="18" name="TextBox 17"/>
+          <p:cNvPr id="18" name="deckgen:ornament"/>
           <p:cNvSpPr txBox="1"/>
           <p:nvPr/>
         </p:nvSpPr>
@@ -4421,7 +4421,7 @@
       </p:sp>
       <p:sp>
         <p:nvSpPr>
-          <p:cNvPr id="22" name="TextBox 21"/>
+          <p:cNvPr id="22" name="deckgen:ornament"/>
           <p:cNvSpPr txBox="1"/>
           <p:nvPr/>
         </p:nvSpPr>
@@ -4743,7 +4743,7 @@
       <p:grpSpPr/>
       <p:sp>
         <p:nvSpPr>
-          <p:cNvPr id="2" name="Oval 1"/>
+          <p:cNvPr id="2" name="deckgen:decor"/>
           <p:cNvSpPr/>
           <p:nvPr/>
         </p:nvSpPr>
@@ -4773,7 +4773,7 @@
       </p:sp>
       <p:sp>
         <p:nvSpPr>
-          <p:cNvPr id="3" name="Oval 2"/>
+          <p:cNvPr id="3" name="deckgen:decor"/>
           <p:cNvSpPr/>
           <p:nvPr/>
         </p:nvSpPr>
@@ -4996,7 +4996,7 @@
         </p:nvSpPr>
         <p:spPr>
           <a:xfrm>
-            <a:off x="1428750" y="5486400"/>
+            <a:off x="1428750" y="5476875"/>
             <a:ext cx="419100" cy="381000"/>
           </a:xfrm>
           <a:prstGeom prst="rect">
@@ -5037,7 +5037,7 @@
         </p:nvSpPr>
         <p:spPr>
           <a:xfrm>
-            <a:off x="1905000" y="5486400"/>
+            <a:off x="1905000" y="5476875"/>
             <a:ext cx="6724650" cy="381000"/>
           </a:xfrm>
           <a:prstGeom prst="rect">
@@ -5112,7 +5112,7 @@
         </p:nvSpPr>
         <p:spPr>
           <a:xfrm>
-            <a:off x="9658350" y="5486400"/>
+            <a:off x="9658350" y="5476875"/>
             <a:ext cx="419100" cy="381000"/>
           </a:xfrm>
           <a:prstGeom prst="rect">
@@ -5153,7 +5153,7 @@
         </p:nvSpPr>
         <p:spPr>
           <a:xfrm>
-            <a:off x="10134600" y="5486400"/>
+            <a:off x="10134600" y="5476875"/>
             <a:ext cx="6724650" cy="381000"/>
           </a:xfrm>
           <a:prstGeom prst="rect">
@@ -5228,7 +5228,7 @@
         </p:nvSpPr>
         <p:spPr>
           <a:xfrm>
-            <a:off x="1428750" y="6515100"/>
+            <a:off x="1428750" y="6505575"/>
             <a:ext cx="419100" cy="381000"/>
           </a:xfrm>
           <a:prstGeom prst="rect">
@@ -5269,7 +5269,7 @@
         </p:nvSpPr>
         <p:spPr>
           <a:xfrm>
-            <a:off x="1905000" y="6515100"/>
+            <a:off x="1905000" y="6505575"/>
             <a:ext cx="6724650" cy="381000"/>
           </a:xfrm>
           <a:prstGeom prst="rect">
@@ -5344,7 +5344,7 @@
         </p:nvSpPr>
         <p:spPr>
           <a:xfrm>
-            <a:off x="9658350" y="6515100"/>
+            <a:off x="9658350" y="6505575"/>
             <a:ext cx="419100" cy="381000"/>
           </a:xfrm>
           <a:prstGeom prst="rect">
@@ -5385,7 +5385,7 @@
         </p:nvSpPr>
         <p:spPr>
           <a:xfrm>
-            <a:off x="10134600" y="6515100"/>
+            <a:off x="10134600" y="6505575"/>
             <a:ext cx="6724650" cy="381000"/>
           </a:xfrm>
           <a:prstGeom prst="rect">
@@ -5550,7 +5550,7 @@
       <p:grpSpPr/>
       <p:sp>
         <p:nvSpPr>
-          <p:cNvPr id="2" name="Oval 1"/>
+          <p:cNvPr id="2" name="deckgen:decor"/>
           <p:cNvSpPr/>
           <p:nvPr/>
         </p:nvSpPr>
@@ -5580,7 +5580,7 @@
       </p:sp>
       <p:sp>
         <p:nvSpPr>
-          <p:cNvPr id="3" name="Oval 2"/>
+          <p:cNvPr id="3" name="deckgen:decor"/>
           <p:cNvSpPr/>
           <p:nvPr/>
         </p:nvSpPr>
@@ -5610,7 +5610,7 @@
       </p:sp>
       <p:sp>
         <p:nvSpPr>
-          <p:cNvPr id="4" name="Oval 3"/>
+          <p:cNvPr id="4" name="deckgen:decor"/>
           <p:cNvSpPr/>
           <p:nvPr/>
         </p:nvSpPr>
@@ -6183,7 +6183,7 @@
                 <a:ea typeface="Pretendard"/>
                 <a:cs typeface="Pretendard"/>
               </a:rPr>
-              <a:t>자주 겪는 오류 네 가지의 원인과 해결을 안다</a:t>
+              <a:t>자주 겪는 오류 다섯 가지의 원인과 해결을 안다</a:t>
             </a:r>
           </a:p>
         </p:txBody>
@@ -6541,7 +6541,7 @@
       <p:grpSpPr/>
       <p:sp>
         <p:nvSpPr>
-          <p:cNvPr id="2" name="Oval 1"/>
+          <p:cNvPr id="2" name="deckgen:decor"/>
           <p:cNvSpPr/>
           <p:nvPr/>
         </p:nvSpPr>
@@ -6571,7 +6571,7 @@
       </p:sp>
       <p:sp>
         <p:nvSpPr>
-          <p:cNvPr id="3" name="Oval 2"/>
+          <p:cNvPr id="3" name="deckgen:decor"/>
           <p:cNvSpPr/>
           <p:nvPr/>
         </p:nvSpPr>
@@ -6601,7 +6601,7 @@
       </p:sp>
       <p:sp>
         <p:nvSpPr>
-          <p:cNvPr id="4" name="Oval 3"/>
+          <p:cNvPr id="4" name="deckgen:decor"/>
           <p:cNvSpPr/>
           <p:nvPr/>
         </p:nvSpPr>
@@ -8252,7 +8252,7 @@
       <p:grpSpPr/>
       <p:sp>
         <p:nvSpPr>
-          <p:cNvPr id="2" name="Oval 1"/>
+          <p:cNvPr id="2" name="deckgen:decor"/>
           <p:cNvSpPr/>
           <p:nvPr/>
         </p:nvSpPr>
@@ -8282,7 +8282,7 @@
       </p:sp>
       <p:sp>
         <p:nvSpPr>
-          <p:cNvPr id="3" name="Oval 2"/>
+          <p:cNvPr id="3" name="deckgen:decor"/>
           <p:cNvSpPr/>
           <p:nvPr/>
         </p:nvSpPr>
@@ -8312,7 +8312,7 @@
       </p:sp>
       <p:sp>
         <p:nvSpPr>
-          <p:cNvPr id="4" name="Oval 3"/>
+          <p:cNvPr id="4" name="deckgen:decor"/>
           <p:cNvSpPr/>
           <p:nvPr/>
         </p:nvSpPr>
@@ -9235,7 +9235,7 @@
       <p:grpSpPr/>
       <p:sp>
         <p:nvSpPr>
-          <p:cNvPr id="2" name="Oval 1"/>
+          <p:cNvPr id="2" name="deckgen:decor"/>
           <p:cNvSpPr/>
           <p:nvPr/>
         </p:nvSpPr>
@@ -9265,7 +9265,7 @@
       </p:sp>
       <p:sp>
         <p:nvSpPr>
-          <p:cNvPr id="3" name="Oval 2"/>
+          <p:cNvPr id="3" name="deckgen:decor"/>
           <p:cNvSpPr/>
           <p:nvPr/>
         </p:nvSpPr>
@@ -9295,7 +9295,7 @@
       </p:sp>
       <p:sp>
         <p:nvSpPr>
-          <p:cNvPr id="4" name="Oval 3"/>
+          <p:cNvPr id="4" name="deckgen:decor"/>
           <p:cNvSpPr/>
           <p:nvPr/>
         </p:nvSpPr>
@@ -10235,7 +10235,7 @@
       <p:grpSpPr/>
       <p:sp>
         <p:nvSpPr>
-          <p:cNvPr id="2" name="Oval 1"/>
+          <p:cNvPr id="2" name="deckgen:decor"/>
           <p:cNvSpPr/>
           <p:nvPr/>
         </p:nvSpPr>
@@ -10265,7 +10265,7 @@
       </p:sp>
       <p:sp>
         <p:nvSpPr>
-          <p:cNvPr id="3" name="Oval 2"/>
+          <p:cNvPr id="3" name="deckgen:decor"/>
           <p:cNvSpPr/>
           <p:nvPr/>
         </p:nvSpPr>
@@ -10295,7 +10295,7 @@
       </p:sp>
       <p:sp>
         <p:nvSpPr>
-          <p:cNvPr id="4" name="Oval 3"/>
+          <p:cNvPr id="4" name="deckgen:decor"/>
           <p:cNvSpPr/>
           <p:nvPr/>
         </p:nvSpPr>
@@ -11735,7 +11735,7 @@
       <p:grpSpPr/>
       <p:sp>
         <p:nvSpPr>
-          <p:cNvPr id="2" name="Oval 1"/>
+          <p:cNvPr id="2" name="deckgen:decor"/>
           <p:cNvSpPr/>
           <p:nvPr/>
         </p:nvSpPr>
@@ -11765,7 +11765,7 @@
       </p:sp>
       <p:sp>
         <p:nvSpPr>
-          <p:cNvPr id="3" name="Oval 2"/>
+          <p:cNvPr id="3" name="deckgen:decor"/>
           <p:cNvSpPr/>
           <p:nvPr/>
         </p:nvSpPr>
@@ -11795,7 +11795,7 @@
       </p:sp>
       <p:sp>
         <p:nvSpPr>
-          <p:cNvPr id="4" name="Oval 3"/>
+          <p:cNvPr id="4" name="deckgen:decor"/>
           <p:cNvSpPr/>
           <p:nvPr/>
         </p:nvSpPr>
@@ -12776,7 +12776,7 @@
                 <a:ea typeface="Pretendard"/>
                 <a:cs typeface="Pretendard"/>
               </a:rPr>
-              <a:t>RUNNING 인데</a:t>
+              <a:t>태스크 FAILED · Null</a:t>
             </a:r>
           </a:p>
           <a:p>
@@ -12794,7 +12794,7 @@
                 <a:ea typeface="Pretendard"/>
                 <a:cs typeface="Pretendard"/>
               </a:rPr>
-              <a:t>파일이 하나도 없다</a:t>
+              <a:t>valued records …</a:t>
             </a:r>
           </a:p>
         </p:txBody>
@@ -12869,7 +12869,7 @@
                 <a:ea typeface="Pretendard"/>
                 <a:cs typeface="Pretendard"/>
               </a:rPr>
-              <a:t>flush.size 미달 ·</a:t>
+              <a:t>6-4 DELETE 뒤</a:t>
             </a:r>
           </a:p>
           <a:p>
@@ -12887,7 +12887,7 @@
                 <a:ea typeface="Pretendard"/>
                 <a:cs typeface="Pretendard"/>
               </a:rPr>
-              <a:t>topics 오타</a:t>
+              <a:t>툼스톤(값 없음)</a:t>
             </a:r>
           </a:p>
         </p:txBody>
@@ -12962,7 +12962,7 @@
                 <a:ea typeface="Pretendard"/>
                 <a:cs typeface="Pretendard"/>
               </a:rPr>
-              <a:t>INSERT 더 · config 의</a:t>
+              <a:t>behavior.on.null.values</a:t>
             </a:r>
           </a:p>
           <a:p>
@@ -12980,7 +12980,7 @@
                 <a:ea typeface="Pretendard"/>
                 <a:cs typeface="Pretendard"/>
               </a:rPr>
-              <a:t>topics 를 목록과 대조</a:t>
+              <a:t>ignore → 다시 등록</a:t>
             </a:r>
           </a:p>
         </p:txBody>
@@ -13055,7 +13055,7 @@
                 <a:ea typeface="Pretendard"/>
                 <a:cs typeface="Pretendard"/>
               </a:rPr>
-              <a:t>9000 포트 충돌로</a:t>
+              <a:t>RUNNING 인데</a:t>
             </a:r>
           </a:p>
           <a:p>
@@ -13073,7 +13073,7 @@
                 <a:ea typeface="Pretendard"/>
                 <a:cs typeface="Pretendard"/>
               </a:rPr>
-              <a:t>minio 가 안 뜬다</a:t>
+              <a:t>파일이 하나도 없다</a:t>
             </a:r>
           </a:p>
         </p:txBody>
@@ -13148,7 +13148,7 @@
                 <a:ea typeface="Pretendard"/>
                 <a:cs typeface="Pretendard"/>
               </a:rPr>
-              <a:t>4·5주차 MinIO 가</a:t>
+              <a:t>flush.size 미달 ·</a:t>
             </a:r>
           </a:p>
           <a:p>
@@ -13166,7 +13166,7 @@
                 <a:ea typeface="Pretendard"/>
                 <a:cs typeface="Pretendard"/>
               </a:rPr>
-              <a:t>살아 있다</a:t>
+              <a:t>topics 오타</a:t>
             </a:r>
           </a:p>
         </p:txBody>
@@ -13241,7 +13241,7 @@
                 <a:ea typeface="Pretendard"/>
                 <a:cs typeface="Pretendard"/>
               </a:rPr>
-              <a:t>그쪽 stop 또는</a:t>
+              <a:t>INSERT 더 · config 의</a:t>
             </a:r>
           </a:p>
           <a:p>
@@ -13259,14 +13259,293 @@
                 <a:ea typeface="Pretendard"/>
                 <a:cs typeface="Pretendard"/>
               </a:rPr>
-              <a:t>"9010:9000" 으로</a:t>
-            </a:r>
-          </a:p>
-        </p:txBody>
-      </p:sp>
-      <p:sp>
-        <p:nvSpPr>
-          <p:cNvPr id="38" name="TextBox 37"/>
+              <a:t>topics 를 목록과 대조</a:t>
+            </a:r>
+          </a:p>
+        </p:txBody>
+      </p:sp>
+      <p:sp>
+        <p:nvSpPr>
+          <p:cNvPr id="38" name="Rounded Rectangle 37"/>
+          <p:cNvSpPr/>
+          <p:nvPr/>
+        </p:nvSpPr>
+        <p:spPr>
+          <a:xfrm>
+            <a:off x="1143000" y="6343650"/>
+            <a:ext cx="5082540" cy="647700"/>
+          </a:xfrm>
+          <a:prstGeom prst="roundRect">
+            <a:avLst>
+              <a:gd name="adj" fmla="val 5882"/>
+            </a:avLst>
+          </a:prstGeom>
+          <a:solidFill>
+            <a:srgbClr val="EDF3FD"/>
+          </a:solidFill>
+          <a:ln w="9525">
+            <a:solidFill>
+              <a:srgbClr val="BFD3F5"/>
+            </a:solidFill>
+          </a:ln>
+          <a:effectLst/>
+        </p:spPr>
+        <p:txBody>
+          <a:bodyPr rtlCol="0" anchor="ctr" wrap="square"/>
+          <a:lstStyle/>
+          <a:p>
+            <a:pPr algn="ctr"/>
+          </a:p>
+        </p:txBody>
+      </p:sp>
+      <p:sp>
+        <p:nvSpPr>
+          <p:cNvPr id="39" name="TextBox 38"/>
+          <p:cNvSpPr txBox="1"/>
+          <p:nvPr/>
+        </p:nvSpPr>
+        <p:spPr>
+          <a:xfrm>
+            <a:off x="1238250" y="6343650"/>
+            <a:ext cx="4892040" cy="647700"/>
+          </a:xfrm>
+          <a:prstGeom prst="rect">
+            <a:avLst/>
+          </a:prstGeom>
+          <a:noFill/>
+        </p:spPr>
+        <p:txBody>
+          <a:bodyPr wrap="square" lIns="0" rIns="0" tIns="0" bIns="0" anchor="ctr">
+            <a:spAutoFit/>
+          </a:bodyPr>
+          <a:lstStyle/>
+          <a:p>
+            <a:pPr algn="l">
+              <a:lnSpc>
+                <a:spcPct val="115000"/>
+              </a:lnSpc>
+            </a:pPr>
+            <a:r>
+              <a:rPr sz="1875" b="1">
+                <a:solidFill>
+                  <a:srgbClr val="0D2B5E"/>
+                </a:solidFill>
+                <a:latin typeface="Pretendard"/>
+                <a:ea typeface="Pretendard"/>
+                <a:cs typeface="Pretendard"/>
+              </a:rPr>
+              <a:t>9000 충돌 · 이름</a:t>
+            </a:r>
+          </a:p>
+          <a:p>
+            <a:pPr algn="l">
+              <a:lnSpc>
+                <a:spcPct val="115000"/>
+              </a:lnSpc>
+            </a:pPr>
+            <a:r>
+              <a:rPr sz="1875" b="1">
+                <a:solidFill>
+                  <a:srgbClr val="0D2B5E"/>
+                </a:solidFill>
+                <a:latin typeface="Pretendard"/>
+                <a:ea typeface="Pretendard"/>
+                <a:cs typeface="Pretendard"/>
+              </a:rPr>
+              <a:t>"/minio" 이미 사용</a:t>
+            </a:r>
+          </a:p>
+        </p:txBody>
+      </p:sp>
+      <p:sp>
+        <p:nvSpPr>
+          <p:cNvPr id="40" name="Rounded Rectangle 39"/>
+          <p:cNvSpPr/>
+          <p:nvPr/>
+        </p:nvSpPr>
+        <p:spPr>
+          <a:xfrm>
+            <a:off x="6263640" y="6343650"/>
+            <a:ext cx="5082540" cy="647700"/>
+          </a:xfrm>
+          <a:prstGeom prst="roundRect">
+            <a:avLst>
+              <a:gd name="adj" fmla="val 5882"/>
+            </a:avLst>
+          </a:prstGeom>
+          <a:solidFill>
+            <a:srgbClr val="FAFBFD"/>
+          </a:solidFill>
+          <a:ln w="9525">
+            <a:solidFill>
+              <a:srgbClr val="DCE1E8"/>
+            </a:solidFill>
+          </a:ln>
+          <a:effectLst/>
+        </p:spPr>
+        <p:txBody>
+          <a:bodyPr rtlCol="0" anchor="ctr" wrap="square"/>
+          <a:lstStyle/>
+          <a:p>
+            <a:pPr algn="ctr"/>
+          </a:p>
+        </p:txBody>
+      </p:sp>
+      <p:sp>
+        <p:nvSpPr>
+          <p:cNvPr id="41" name="TextBox 40"/>
+          <p:cNvSpPr txBox="1"/>
+          <p:nvPr/>
+        </p:nvSpPr>
+        <p:spPr>
+          <a:xfrm>
+            <a:off x="6358890" y="6343650"/>
+            <a:ext cx="4892040" cy="647700"/>
+          </a:xfrm>
+          <a:prstGeom prst="rect">
+            <a:avLst/>
+          </a:prstGeom>
+          <a:noFill/>
+        </p:spPr>
+        <p:txBody>
+          <a:bodyPr wrap="square" lIns="0" rIns="0" tIns="0" bIns="0" anchor="ctr">
+            <a:spAutoFit/>
+          </a:bodyPr>
+          <a:lstStyle/>
+          <a:p>
+            <a:pPr algn="ctr">
+              <a:lnSpc>
+                <a:spcPct val="115000"/>
+              </a:lnSpc>
+            </a:pPr>
+            <a:r>
+              <a:rPr sz="1875" b="0">
+                <a:solidFill>
+                  <a:srgbClr val="3D3D3D"/>
+                </a:solidFill>
+                <a:latin typeface="Pretendard"/>
+                <a:ea typeface="Pretendard"/>
+                <a:cs typeface="Pretendard"/>
+              </a:rPr>
+              <a:t>4·5주차 MinIO 살아 있음</a:t>
+            </a:r>
+          </a:p>
+          <a:p>
+            <a:pPr algn="ctr">
+              <a:lnSpc>
+                <a:spcPct val="115000"/>
+              </a:lnSpc>
+            </a:pPr>
+            <a:r>
+              <a:rPr sz="1875" b="0">
+                <a:solidFill>
+                  <a:srgbClr val="3D3D3D"/>
+                </a:solidFill>
+                <a:latin typeface="Pretendard"/>
+                <a:ea typeface="Pretendard"/>
+                <a:cs typeface="Pretendard"/>
+              </a:rPr>
+              <a:t>· 4주차 minio 이름</a:t>
+            </a:r>
+          </a:p>
+        </p:txBody>
+      </p:sp>
+      <p:sp>
+        <p:nvSpPr>
+          <p:cNvPr id="42" name="Rounded Rectangle 41"/>
+          <p:cNvSpPr/>
+          <p:nvPr/>
+        </p:nvSpPr>
+        <p:spPr>
+          <a:xfrm>
+            <a:off x="11384280" y="6343650"/>
+            <a:ext cx="5760720" cy="647700"/>
+          </a:xfrm>
+          <a:prstGeom prst="roundRect">
+            <a:avLst>
+              <a:gd name="adj" fmla="val 5882"/>
+            </a:avLst>
+          </a:prstGeom>
+          <a:solidFill>
+            <a:srgbClr val="FAFBFD"/>
+          </a:solidFill>
+          <a:ln w="9525">
+            <a:solidFill>
+              <a:srgbClr val="DCE1E8"/>
+            </a:solidFill>
+          </a:ln>
+          <a:effectLst/>
+        </p:spPr>
+        <p:txBody>
+          <a:bodyPr rtlCol="0" anchor="ctr" wrap="square"/>
+          <a:lstStyle/>
+          <a:p>
+            <a:pPr algn="ctr"/>
+          </a:p>
+        </p:txBody>
+      </p:sp>
+      <p:sp>
+        <p:nvSpPr>
+          <p:cNvPr id="43" name="TextBox 42"/>
+          <p:cNvSpPr txBox="1"/>
+          <p:nvPr/>
+        </p:nvSpPr>
+        <p:spPr>
+          <a:xfrm>
+            <a:off x="11479530" y="6343650"/>
+            <a:ext cx="5570220" cy="647700"/>
+          </a:xfrm>
+          <a:prstGeom prst="rect">
+            <a:avLst/>
+          </a:prstGeom>
+          <a:noFill/>
+        </p:spPr>
+        <p:txBody>
+          <a:bodyPr wrap="square" lIns="0" rIns="0" tIns="0" bIns="0" anchor="ctr">
+            <a:spAutoFit/>
+          </a:bodyPr>
+          <a:lstStyle/>
+          <a:p>
+            <a:pPr algn="ctr">
+              <a:lnSpc>
+                <a:spcPct val="115000"/>
+              </a:lnSpc>
+            </a:pPr>
+            <a:r>
+              <a:rPr sz="1875" b="0">
+                <a:solidFill>
+                  <a:srgbClr val="3D3D3D"/>
+                </a:solidFill>
+                <a:latin typeface="Pretendard"/>
+                <a:ea typeface="Pretendard"/>
+                <a:cs typeface="Pretendard"/>
+              </a:rPr>
+              <a:t>그쪽 stop · 이름은</a:t>
+            </a:r>
+          </a:p>
+          <a:p>
+            <a:pPr algn="ctr">
+              <a:lnSpc>
+                <a:spcPct val="115000"/>
+              </a:lnSpc>
+            </a:pPr>
+            <a:r>
+              <a:rPr sz="1875" b="0">
+                <a:solidFill>
+                  <a:srgbClr val="3D3D3D"/>
+                </a:solidFill>
+                <a:latin typeface="Pretendard"/>
+                <a:ea typeface="Pretendard"/>
+                <a:cs typeface="Pretendard"/>
+              </a:rPr>
+              <a:t>cdc-minio 로</a:t>
+            </a:r>
+          </a:p>
+        </p:txBody>
+      </p:sp>
+      <p:sp>
+        <p:nvSpPr>
+          <p:cNvPr id="44" name="TextBox 43"/>
           <p:cNvSpPr txBox="1"/>
           <p:nvPr/>
         </p:nvSpPr>
@@ -13307,7 +13586,7 @@
       </p:sp>
       <p:sp>
         <p:nvSpPr>
-          <p:cNvPr id="39" name="Rectangle 38"/>
+          <p:cNvPr id="45" name="Rectangle 44"/>
           <p:cNvSpPr/>
           <p:nvPr/>
         </p:nvSpPr>
@@ -13337,7 +13616,7 @@
       </p:sp>
       <p:sp>
         <p:nvSpPr>
-          <p:cNvPr id="40" name="TextBox 39"/>
+          <p:cNvPr id="46" name="TextBox 45"/>
           <p:cNvSpPr txBox="1"/>
           <p:nvPr/>
         </p:nvSpPr>
@@ -13378,7 +13657,7 @@
       </p:sp>
       <p:sp>
         <p:nvSpPr>
-          <p:cNvPr id="41" name="TextBox 40"/>
+          <p:cNvPr id="47" name="TextBox 46"/>
           <p:cNvSpPr txBox="1"/>
           <p:nvPr/>
         </p:nvSpPr>
@@ -13437,7 +13716,7 @@
       <p:grpSpPr/>
       <p:sp>
         <p:nvSpPr>
-          <p:cNvPr id="2" name="Oval 1"/>
+          <p:cNvPr id="2" name="deckgen:decor"/>
           <p:cNvSpPr/>
           <p:nvPr/>
         </p:nvSpPr>
@@ -13467,7 +13746,7 @@
       </p:sp>
       <p:sp>
         <p:nvSpPr>
-          <p:cNvPr id="3" name="Oval 2"/>
+          <p:cNvPr id="3" name="deckgen:decor"/>
           <p:cNvSpPr/>
           <p:nvPr/>
         </p:nvSpPr>
@@ -13497,7 +13776,7 @@
       </p:sp>
       <p:sp>
         <p:nvSpPr>
-          <p:cNvPr id="4" name="Oval 3"/>
+          <p:cNvPr id="4" name="deckgen:decor"/>
           <p:cNvSpPr/>
           <p:nvPr/>
         </p:nvSpPr>
@@ -14557,7 +14836,7 @@
       <p:grpSpPr/>
       <p:sp>
         <p:nvSpPr>
-          <p:cNvPr id="2" name="Oval 1"/>
+          <p:cNvPr id="2" name="deckgen:decor"/>
           <p:cNvSpPr/>
           <p:nvPr/>
         </p:nvSpPr>
@@ -14587,7 +14866,7 @@
       </p:sp>
       <p:sp>
         <p:nvSpPr>
-          <p:cNvPr id="3" name="Oval 2"/>
+          <p:cNvPr id="3" name="deckgen:decor"/>
           <p:cNvSpPr/>
           <p:nvPr/>
         </p:nvSpPr>
@@ -14617,7 +14896,7 @@
       </p:sp>
       <p:sp>
         <p:nvSpPr>
-          <p:cNvPr id="4" name="Oval 3"/>
+          <p:cNvPr id="4" name="deckgen:decor"/>
           <p:cNvSpPr/>
           <p:nvPr/>
         </p:nvSpPr>
@@ -14722,7 +15001,7 @@
                 <a:ea typeface="Pretendard"/>
                 <a:cs typeface="Pretendard"/>
               </a:rPr>
-              <a:t>stop 만 — down -v 는 데이터까지 지운다</a:t>
+              <a:t>stop 만 — down 은 -v 없이도 토픽을 지운다</a:t>
             </a:r>
           </a:p>
         </p:txBody>
@@ -15126,7 +15405,7 @@
                 <a:ea typeface="Pretendard"/>
                 <a:cs typeface="Pretendard"/>
               </a:rPr>
-              <a:t>내려간 것을 확인</a:t>
+              <a:t>넷이 Exited — stop · start 뒤에는 그대로(실측)</a:t>
             </a:r>
           </a:p>
         </p:txBody>
@@ -15388,7 +15667,7 @@
                 <a:ea typeface="Pretendard"/>
                 <a:cs typeface="Pretendard"/>
               </a:rPr>
-              <a:t>down -v 는</a:t>
+              <a:t>down 하면</a:t>
             </a:r>
           </a:p>
         </p:txBody>
@@ -15429,7 +15708,7 @@
                 <a:ea typeface="Pretendard"/>
                 <a:cs typeface="Pretendard"/>
               </a:rPr>
-              <a:t>Kafka 로그와</a:t>
+              <a:t>토픽·커넥터</a:t>
             </a:r>
           </a:p>
           <a:p>
@@ -15447,7 +15726,7 @@
                 <a:ea typeface="Pretendard"/>
                 <a:cs typeface="Pretendard"/>
               </a:rPr>
-              <a:t>DB 까지 삭제</a:t>
+              <a:t>그룹 삭제</a:t>
             </a:r>
           </a:p>
         </p:txBody>
